--- a/topic02-understanding-class-definitions/unit-1/talk-4/d-class-definitions-local-var.pptx
+++ b/topic02-understanding-class-definitions/unit-1/talk-4/d-class-definitions-local-var.pptx
@@ -495,14 +495,14 @@
           </a:ln>
           <a:extLst>
             <a:ext uri="{909E8E84-426E-40dd-AFC4-6F175D3DCCD1}">
-              <a14:hiddenFill xmlns:a14="http://schemas.microsoft.com/office/drawing/2010/main" xmlns="">
+              <a14:hiddenFill xmlns="" xmlns:a14="http://schemas.microsoft.com/office/drawing/2010/main">
                 <a:solidFill>
                   <a:srgbClr val="FFFFFF"/>
                 </a:solidFill>
               </a14:hiddenFill>
             </a:ext>
             <a:ext uri="{FAA26D3D-D897-4be2-8F04-BA451C77F1D7}">
-              <ma14:placeholderFlag xmlns:ma14="http://schemas.microsoft.com/office/mac/drawingml/2011/main" xmlns="" val="1"/>
+              <ma14:placeholderFlag xmlns="" xmlns:ma14="http://schemas.microsoft.com/office/mac/drawingml/2011/main" val="1"/>
             </a:ext>
           </a:extLst>
         </p:spPr>
@@ -846,14 +846,14 @@
           <a:noFill/>
           <a:extLst>
             <a:ext uri="{909E8E84-426E-40dd-AFC4-6F175D3DCCD1}">
-              <a14:hiddenFill xmlns:a14="http://schemas.microsoft.com/office/drawing/2010/main" xmlns="">
+              <a14:hiddenFill xmlns="" xmlns:a14="http://schemas.microsoft.com/office/drawing/2010/main">
                 <a:solidFill>
                   <a:srgbClr val="FFFFFF"/>
                 </a:solidFill>
               </a14:hiddenFill>
             </a:ext>
             <a:ext uri="{91240B29-F687-4f45-9708-019B960494DF}">
-              <a14:hiddenLine xmlns:a14="http://schemas.microsoft.com/office/drawing/2010/main" xmlns="" w="9525">
+              <a14:hiddenLine xmlns="" xmlns:a14="http://schemas.microsoft.com/office/drawing/2010/main" w="9525">
                 <a:solidFill>
                   <a:srgbClr val="000000"/>
                 </a:solidFill>
@@ -1001,14 +1001,14 @@
           <a:noFill/>
           <a:extLst>
             <a:ext uri="{909E8E84-426E-40dd-AFC4-6F175D3DCCD1}">
-              <a14:hiddenFill xmlns:a14="http://schemas.microsoft.com/office/drawing/2010/main" xmlns="">
+              <a14:hiddenFill xmlns="" xmlns:a14="http://schemas.microsoft.com/office/drawing/2010/main">
                 <a:solidFill>
                   <a:srgbClr val="FFFFFF"/>
                 </a:solidFill>
               </a14:hiddenFill>
             </a:ext>
             <a:ext uri="{91240B29-F687-4f45-9708-019B960494DF}">
-              <a14:hiddenLine xmlns:a14="http://schemas.microsoft.com/office/drawing/2010/main" xmlns="" w="9525">
+              <a14:hiddenLine xmlns="" xmlns:a14="http://schemas.microsoft.com/office/drawing/2010/main" w="9525">
                 <a:solidFill>
                   <a:srgbClr val="000000"/>
                 </a:solidFill>
@@ -1156,14 +1156,14 @@
           <a:noFill/>
           <a:extLst>
             <a:ext uri="{909E8E84-426E-40dd-AFC4-6F175D3DCCD1}">
-              <a14:hiddenFill xmlns:a14="http://schemas.microsoft.com/office/drawing/2010/main" xmlns="">
+              <a14:hiddenFill xmlns="" xmlns:a14="http://schemas.microsoft.com/office/drawing/2010/main">
                 <a:solidFill>
                   <a:srgbClr val="FFFFFF"/>
                 </a:solidFill>
               </a14:hiddenFill>
             </a:ext>
             <a:ext uri="{91240B29-F687-4f45-9708-019B960494DF}">
-              <a14:hiddenLine xmlns:a14="http://schemas.microsoft.com/office/drawing/2010/main" xmlns="" w="9525">
+              <a14:hiddenLine xmlns="" xmlns:a14="http://schemas.microsoft.com/office/drawing/2010/main" w="9525">
                 <a:solidFill>
                   <a:srgbClr val="000000"/>
                 </a:solidFill>
@@ -1335,7 +1335,7 @@
         <p:spPr>
           <a:extLst>
             <a:ext uri="{FAA26D3D-D897-4be2-8F04-BA451C77F1D7}">
-              <ma14:placeholderFlag xmlns:ma14="http://schemas.microsoft.com/office/mac/drawingml/2011/main" xmlns="" val="1"/>
+              <ma14:placeholderFlag xmlns="" xmlns:ma14="http://schemas.microsoft.com/office/mac/drawingml/2011/main" val="1"/>
             </a:ext>
           </a:extLst>
         </p:spPr>
@@ -1397,14 +1397,14 @@
           <a:noFill/>
           <a:extLst>
             <a:ext uri="{909E8E84-426E-40dd-AFC4-6F175D3DCCD1}">
-              <a14:hiddenFill xmlns:a14="http://schemas.microsoft.com/office/drawing/2010/main" xmlns="">
+              <a14:hiddenFill xmlns="" xmlns:a14="http://schemas.microsoft.com/office/drawing/2010/main">
                 <a:solidFill>
                   <a:srgbClr val="FFFFFF"/>
                 </a:solidFill>
               </a14:hiddenFill>
             </a:ext>
             <a:ext uri="{91240B29-F687-4f45-9708-019B960494DF}">
-              <a14:hiddenLine xmlns:a14="http://schemas.microsoft.com/office/drawing/2010/main" xmlns="" w="9525">
+              <a14:hiddenLine xmlns="" xmlns:a14="http://schemas.microsoft.com/office/drawing/2010/main" w="9525">
                 <a:solidFill>
                   <a:srgbClr val="000000"/>
                 </a:solidFill>
@@ -1552,14 +1552,14 @@
           <a:noFill/>
           <a:extLst>
             <a:ext uri="{909E8E84-426E-40dd-AFC4-6F175D3DCCD1}">
-              <a14:hiddenFill xmlns:a14="http://schemas.microsoft.com/office/drawing/2010/main" xmlns="">
+              <a14:hiddenFill xmlns="" xmlns:a14="http://schemas.microsoft.com/office/drawing/2010/main">
                 <a:solidFill>
                   <a:srgbClr val="FFFFFF"/>
                 </a:solidFill>
               </a14:hiddenFill>
             </a:ext>
             <a:ext uri="{91240B29-F687-4f45-9708-019B960494DF}">
-              <a14:hiddenLine xmlns:a14="http://schemas.microsoft.com/office/drawing/2010/main" xmlns="" w="9525">
+              <a14:hiddenLine xmlns="" xmlns:a14="http://schemas.microsoft.com/office/drawing/2010/main" w="9525">
                 <a:solidFill>
                   <a:srgbClr val="000000"/>
                 </a:solidFill>
@@ -1707,14 +1707,14 @@
           <a:noFill/>
           <a:extLst>
             <a:ext uri="{909E8E84-426E-40dd-AFC4-6F175D3DCCD1}">
-              <a14:hiddenFill xmlns:a14="http://schemas.microsoft.com/office/drawing/2010/main" xmlns="">
+              <a14:hiddenFill xmlns="" xmlns:a14="http://schemas.microsoft.com/office/drawing/2010/main">
                 <a:solidFill>
                   <a:srgbClr val="FFFFFF"/>
                 </a:solidFill>
               </a14:hiddenFill>
             </a:ext>
             <a:ext uri="{91240B29-F687-4f45-9708-019B960494DF}">
-              <a14:hiddenLine xmlns:a14="http://schemas.microsoft.com/office/drawing/2010/main" xmlns="" w="9525">
+              <a14:hiddenLine xmlns="" xmlns:a14="http://schemas.microsoft.com/office/drawing/2010/main" w="9525">
                 <a:solidFill>
                   <a:srgbClr val="000000"/>
                 </a:solidFill>
@@ -1886,7 +1886,7 @@
         <p:spPr>
           <a:extLst>
             <a:ext uri="{FAA26D3D-D897-4be2-8F04-BA451C77F1D7}">
-              <ma14:placeholderFlag xmlns:ma14="http://schemas.microsoft.com/office/mac/drawingml/2011/main" xmlns="" val="1"/>
+              <ma14:placeholderFlag xmlns="" xmlns:ma14="http://schemas.microsoft.com/office/mac/drawingml/2011/main" val="1"/>
             </a:ext>
           </a:extLst>
         </p:spPr>
@@ -1948,14 +1948,14 @@
           <a:noFill/>
           <a:extLst>
             <a:ext uri="{909E8E84-426E-40dd-AFC4-6F175D3DCCD1}">
-              <a14:hiddenFill xmlns:a14="http://schemas.microsoft.com/office/drawing/2010/main" xmlns="">
+              <a14:hiddenFill xmlns="" xmlns:a14="http://schemas.microsoft.com/office/drawing/2010/main">
                 <a:solidFill>
                   <a:srgbClr val="FFFFFF"/>
                 </a:solidFill>
               </a14:hiddenFill>
             </a:ext>
             <a:ext uri="{91240B29-F687-4f45-9708-019B960494DF}">
-              <a14:hiddenLine xmlns:a14="http://schemas.microsoft.com/office/drawing/2010/main" xmlns="" w="9525">
+              <a14:hiddenLine xmlns="" xmlns:a14="http://schemas.microsoft.com/office/drawing/2010/main" w="9525">
                 <a:solidFill>
                   <a:srgbClr val="000000"/>
                 </a:solidFill>
@@ -2103,14 +2103,14 @@
           <a:noFill/>
           <a:extLst>
             <a:ext uri="{909E8E84-426E-40dd-AFC4-6F175D3DCCD1}">
-              <a14:hiddenFill xmlns:a14="http://schemas.microsoft.com/office/drawing/2010/main" xmlns="">
+              <a14:hiddenFill xmlns="" xmlns:a14="http://schemas.microsoft.com/office/drawing/2010/main">
                 <a:solidFill>
                   <a:srgbClr val="FFFFFF"/>
                 </a:solidFill>
               </a14:hiddenFill>
             </a:ext>
             <a:ext uri="{91240B29-F687-4f45-9708-019B960494DF}">
-              <a14:hiddenLine xmlns:a14="http://schemas.microsoft.com/office/drawing/2010/main" xmlns="" w="9525">
+              <a14:hiddenLine xmlns="" xmlns:a14="http://schemas.microsoft.com/office/drawing/2010/main" w="9525">
                 <a:solidFill>
                   <a:srgbClr val="000000"/>
                 </a:solidFill>
@@ -2258,14 +2258,14 @@
           <a:noFill/>
           <a:extLst>
             <a:ext uri="{909E8E84-426E-40dd-AFC4-6F175D3DCCD1}">
-              <a14:hiddenFill xmlns:a14="http://schemas.microsoft.com/office/drawing/2010/main" xmlns="">
+              <a14:hiddenFill xmlns="" xmlns:a14="http://schemas.microsoft.com/office/drawing/2010/main">
                 <a:solidFill>
                   <a:srgbClr val="FFFFFF"/>
                 </a:solidFill>
               </a14:hiddenFill>
             </a:ext>
             <a:ext uri="{91240B29-F687-4f45-9708-019B960494DF}">
-              <a14:hiddenLine xmlns:a14="http://schemas.microsoft.com/office/drawing/2010/main" xmlns="" w="9525">
+              <a14:hiddenLine xmlns="" xmlns:a14="http://schemas.microsoft.com/office/drawing/2010/main" w="9525">
                 <a:solidFill>
                   <a:srgbClr val="000000"/>
                 </a:solidFill>
@@ -2451,7 +2451,7 @@
           </a:ln>
           <a:extLst>
             <a:ext uri="{FAA26D3D-D897-4be2-8F04-BA451C77F1D7}">
-              <ma14:placeholderFlag xmlns:ma14="http://schemas.microsoft.com/office/mac/drawingml/2011/main" xmlns="" val="1"/>
+              <ma14:placeholderFlag xmlns="" xmlns:ma14="http://schemas.microsoft.com/office/mac/drawingml/2011/main" val="1"/>
             </a:ext>
           </a:extLst>
         </p:spPr>
@@ -2513,14 +2513,14 @@
           <a:noFill/>
           <a:extLst>
             <a:ext uri="{909E8E84-426E-40dd-AFC4-6F175D3DCCD1}">
-              <a14:hiddenFill xmlns:a14="http://schemas.microsoft.com/office/drawing/2010/main" xmlns="">
+              <a14:hiddenFill xmlns="" xmlns:a14="http://schemas.microsoft.com/office/drawing/2010/main">
                 <a:solidFill>
                   <a:srgbClr val="FFFFFF"/>
                 </a:solidFill>
               </a14:hiddenFill>
             </a:ext>
             <a:ext uri="{91240B29-F687-4f45-9708-019B960494DF}">
-              <a14:hiddenLine xmlns:a14="http://schemas.microsoft.com/office/drawing/2010/main" xmlns="" w="9525">
+              <a14:hiddenLine xmlns="" xmlns:a14="http://schemas.microsoft.com/office/drawing/2010/main" w="9525">
                 <a:solidFill>
                   <a:srgbClr val="000000"/>
                 </a:solidFill>
@@ -2668,14 +2668,14 @@
           <a:noFill/>
           <a:extLst>
             <a:ext uri="{909E8E84-426E-40dd-AFC4-6F175D3DCCD1}">
-              <a14:hiddenFill xmlns:a14="http://schemas.microsoft.com/office/drawing/2010/main" xmlns="">
+              <a14:hiddenFill xmlns="" xmlns:a14="http://schemas.microsoft.com/office/drawing/2010/main">
                 <a:solidFill>
                   <a:srgbClr val="FFFFFF"/>
                 </a:solidFill>
               </a14:hiddenFill>
             </a:ext>
             <a:ext uri="{91240B29-F687-4f45-9708-019B960494DF}">
-              <a14:hiddenLine xmlns:a14="http://schemas.microsoft.com/office/drawing/2010/main" xmlns="" w="9525">
+              <a14:hiddenLine xmlns="" xmlns:a14="http://schemas.microsoft.com/office/drawing/2010/main" w="9525">
                 <a:solidFill>
                   <a:srgbClr val="000000"/>
                 </a:solidFill>
@@ -2823,14 +2823,14 @@
           <a:noFill/>
           <a:extLst>
             <a:ext uri="{909E8E84-426E-40dd-AFC4-6F175D3DCCD1}">
-              <a14:hiddenFill xmlns:a14="http://schemas.microsoft.com/office/drawing/2010/main" xmlns="">
+              <a14:hiddenFill xmlns="" xmlns:a14="http://schemas.microsoft.com/office/drawing/2010/main">
                 <a:solidFill>
                   <a:srgbClr val="FFFFFF"/>
                 </a:solidFill>
               </a14:hiddenFill>
             </a:ext>
             <a:ext uri="{91240B29-F687-4f45-9708-019B960494DF}">
-              <a14:hiddenLine xmlns:a14="http://schemas.microsoft.com/office/drawing/2010/main" xmlns="" w="9525">
+              <a14:hiddenLine xmlns="" xmlns:a14="http://schemas.microsoft.com/office/drawing/2010/main" w="9525">
                 <a:solidFill>
                   <a:srgbClr val="000000"/>
                 </a:solidFill>
@@ -3010,14 +3010,14 @@
           <a:noFill/>
           <a:extLst>
             <a:ext uri="{909E8E84-426E-40dd-AFC4-6F175D3DCCD1}">
-              <a14:hiddenFill xmlns:a14="http://schemas.microsoft.com/office/drawing/2010/main" xmlns="">
+              <a14:hiddenFill xmlns="" xmlns:a14="http://schemas.microsoft.com/office/drawing/2010/main">
                 <a:solidFill>
                   <a:srgbClr val="FFFFFF"/>
                 </a:solidFill>
               </a14:hiddenFill>
             </a:ext>
             <a:ext uri="{91240B29-F687-4f45-9708-019B960494DF}">
-              <a14:hiddenLine xmlns:a14="http://schemas.microsoft.com/office/drawing/2010/main" xmlns="" w="9525">
+              <a14:hiddenLine xmlns="" xmlns:a14="http://schemas.microsoft.com/office/drawing/2010/main" w="9525">
                 <a:solidFill>
                   <a:srgbClr val="000000"/>
                 </a:solidFill>
@@ -3027,7 +3027,7 @@
               </a14:hiddenLine>
             </a:ext>
             <a:ext uri="{AF507438-7753-43e0-B8FC-AC1667EBCBE1}">
-              <a14:hiddenEffects xmlns:a14="http://schemas.microsoft.com/office/drawing/2010/main" xmlns="">
+              <a14:hiddenEffects xmlns="" xmlns:a14="http://schemas.microsoft.com/office/drawing/2010/main">
                 <a:effectLst>
                   <a:outerShdw dist="35921" dir="2700000" algn="ctr" rotWithShape="0">
                     <a:srgbClr val="808080"/>
@@ -3036,7 +3036,7 @@
               </a14:hiddenEffects>
             </a:ext>
             <a:ext uri="{53640926-AAD7-44d8-BBD7-CCE9431645EC}">
-              <a14:shadowObscured xmlns:a14="http://schemas.microsoft.com/office/drawing/2010/main" xmlns="" val="1"/>
+              <a14:shadowObscured xmlns="" xmlns:a14="http://schemas.microsoft.com/office/drawing/2010/main" val="1"/>
             </a:ext>
           </a:extLst>
         </p:spPr>
@@ -3109,14 +3109,14 @@
           <a:noFill/>
           <a:extLst>
             <a:ext uri="{909E8E84-426E-40dd-AFC4-6F175D3DCCD1}">
-              <a14:hiddenFill xmlns:a14="http://schemas.microsoft.com/office/drawing/2010/main" xmlns="">
+              <a14:hiddenFill xmlns="" xmlns:a14="http://schemas.microsoft.com/office/drawing/2010/main">
                 <a:solidFill>
                   <a:srgbClr val="FFFFFF"/>
                 </a:solidFill>
               </a14:hiddenFill>
             </a:ext>
             <a:ext uri="{91240B29-F687-4f45-9708-019B960494DF}">
-              <a14:hiddenLine xmlns:a14="http://schemas.microsoft.com/office/drawing/2010/main" xmlns="" w="9525">
+              <a14:hiddenLine xmlns="" xmlns:a14="http://schemas.microsoft.com/office/drawing/2010/main" w="9525">
                 <a:solidFill>
                   <a:srgbClr val="000000"/>
                 </a:solidFill>
@@ -3264,14 +3264,14 @@
           <a:noFill/>
           <a:extLst>
             <a:ext uri="{909E8E84-426E-40dd-AFC4-6F175D3DCCD1}">
-              <a14:hiddenFill xmlns:a14="http://schemas.microsoft.com/office/drawing/2010/main" xmlns="">
+              <a14:hiddenFill xmlns="" xmlns:a14="http://schemas.microsoft.com/office/drawing/2010/main">
                 <a:solidFill>
                   <a:srgbClr val="FFFFFF"/>
                 </a:solidFill>
               </a14:hiddenFill>
             </a:ext>
             <a:ext uri="{91240B29-F687-4f45-9708-019B960494DF}">
-              <a14:hiddenLine xmlns:a14="http://schemas.microsoft.com/office/drawing/2010/main" xmlns="" w="9525">
+              <a14:hiddenLine xmlns="" xmlns:a14="http://schemas.microsoft.com/office/drawing/2010/main" w="9525">
                 <a:solidFill>
                   <a:srgbClr val="000000"/>
                 </a:solidFill>
@@ -3419,14 +3419,14 @@
           <a:noFill/>
           <a:extLst>
             <a:ext uri="{909E8E84-426E-40dd-AFC4-6F175D3DCCD1}">
-              <a14:hiddenFill xmlns:a14="http://schemas.microsoft.com/office/drawing/2010/main" xmlns="">
+              <a14:hiddenFill xmlns="" xmlns:a14="http://schemas.microsoft.com/office/drawing/2010/main">
                 <a:solidFill>
                   <a:srgbClr val="FFFFFF"/>
                 </a:solidFill>
               </a14:hiddenFill>
             </a:ext>
             <a:ext uri="{91240B29-F687-4f45-9708-019B960494DF}">
-              <a14:hiddenLine xmlns:a14="http://schemas.microsoft.com/office/drawing/2010/main" xmlns="" w="9525">
+              <a14:hiddenLine xmlns="" xmlns:a14="http://schemas.microsoft.com/office/drawing/2010/main" w="9525">
                 <a:solidFill>
                   <a:srgbClr val="000000"/>
                 </a:solidFill>
@@ -3598,7 +3598,7 @@
         <p:spPr>
           <a:extLst>
             <a:ext uri="{FAA26D3D-D897-4be2-8F04-BA451C77F1D7}">
-              <ma14:placeholderFlag xmlns:ma14="http://schemas.microsoft.com/office/mac/drawingml/2011/main" xmlns="" val="1"/>
+              <ma14:placeholderFlag xmlns="" xmlns:ma14="http://schemas.microsoft.com/office/mac/drawingml/2011/main" val="1"/>
             </a:ext>
           </a:extLst>
         </p:spPr>
@@ -3660,14 +3660,14 @@
           <a:noFill/>
           <a:extLst>
             <a:ext uri="{909E8E84-426E-40dd-AFC4-6F175D3DCCD1}">
-              <a14:hiddenFill xmlns:a14="http://schemas.microsoft.com/office/drawing/2010/main" xmlns="">
+              <a14:hiddenFill xmlns="" xmlns:a14="http://schemas.microsoft.com/office/drawing/2010/main">
                 <a:solidFill>
                   <a:srgbClr val="FFFFFF"/>
                 </a:solidFill>
               </a14:hiddenFill>
             </a:ext>
             <a:ext uri="{91240B29-F687-4f45-9708-019B960494DF}">
-              <a14:hiddenLine xmlns:a14="http://schemas.microsoft.com/office/drawing/2010/main" xmlns="" w="9525">
+              <a14:hiddenLine xmlns="" xmlns:a14="http://schemas.microsoft.com/office/drawing/2010/main" w="9525">
                 <a:solidFill>
                   <a:srgbClr val="000000"/>
                 </a:solidFill>
@@ -3815,14 +3815,14 @@
           <a:noFill/>
           <a:extLst>
             <a:ext uri="{909E8E84-426E-40dd-AFC4-6F175D3DCCD1}">
-              <a14:hiddenFill xmlns:a14="http://schemas.microsoft.com/office/drawing/2010/main" xmlns="">
+              <a14:hiddenFill xmlns="" xmlns:a14="http://schemas.microsoft.com/office/drawing/2010/main">
                 <a:solidFill>
                   <a:srgbClr val="FFFFFF"/>
                 </a:solidFill>
               </a14:hiddenFill>
             </a:ext>
             <a:ext uri="{91240B29-F687-4f45-9708-019B960494DF}">
-              <a14:hiddenLine xmlns:a14="http://schemas.microsoft.com/office/drawing/2010/main" xmlns="" w="9525">
+              <a14:hiddenLine xmlns="" xmlns:a14="http://schemas.microsoft.com/office/drawing/2010/main" w="9525">
                 <a:solidFill>
                   <a:srgbClr val="000000"/>
                 </a:solidFill>
@@ -3970,14 +3970,14 @@
           <a:noFill/>
           <a:extLst>
             <a:ext uri="{909E8E84-426E-40dd-AFC4-6F175D3DCCD1}">
-              <a14:hiddenFill xmlns:a14="http://schemas.microsoft.com/office/drawing/2010/main" xmlns="">
+              <a14:hiddenFill xmlns="" xmlns:a14="http://schemas.microsoft.com/office/drawing/2010/main">
                 <a:solidFill>
                   <a:srgbClr val="FFFFFF"/>
                 </a:solidFill>
               </a14:hiddenFill>
             </a:ext>
             <a:ext uri="{91240B29-F687-4f45-9708-019B960494DF}">
-              <a14:hiddenLine xmlns:a14="http://schemas.microsoft.com/office/drawing/2010/main" xmlns="" w="9525">
+              <a14:hiddenLine xmlns="" xmlns:a14="http://schemas.microsoft.com/office/drawing/2010/main" w="9525">
                 <a:solidFill>
                   <a:srgbClr val="000000"/>
                 </a:solidFill>
@@ -4149,7 +4149,7 @@
         <p:spPr>
           <a:extLst>
             <a:ext uri="{FAA26D3D-D897-4be2-8F04-BA451C77F1D7}">
-              <ma14:placeholderFlag xmlns:ma14="http://schemas.microsoft.com/office/mac/drawingml/2011/main" xmlns="" val="1"/>
+              <ma14:placeholderFlag xmlns="" xmlns:ma14="http://schemas.microsoft.com/office/mac/drawingml/2011/main" val="1"/>
             </a:ext>
           </a:extLst>
         </p:spPr>
@@ -4211,14 +4211,14 @@
           <a:noFill/>
           <a:extLst>
             <a:ext uri="{909E8E84-426E-40dd-AFC4-6F175D3DCCD1}">
-              <a14:hiddenFill xmlns:a14="http://schemas.microsoft.com/office/drawing/2010/main" xmlns="">
+              <a14:hiddenFill xmlns="" xmlns:a14="http://schemas.microsoft.com/office/drawing/2010/main">
                 <a:solidFill>
                   <a:srgbClr val="FFFFFF"/>
                 </a:solidFill>
               </a14:hiddenFill>
             </a:ext>
             <a:ext uri="{91240B29-F687-4f45-9708-019B960494DF}">
-              <a14:hiddenLine xmlns:a14="http://schemas.microsoft.com/office/drawing/2010/main" xmlns="" w="9525">
+              <a14:hiddenLine xmlns="" xmlns:a14="http://schemas.microsoft.com/office/drawing/2010/main" w="9525">
                 <a:solidFill>
                   <a:srgbClr val="000000"/>
                 </a:solidFill>
@@ -4366,14 +4366,14 @@
           <a:noFill/>
           <a:extLst>
             <a:ext uri="{909E8E84-426E-40dd-AFC4-6F175D3DCCD1}">
-              <a14:hiddenFill xmlns:a14="http://schemas.microsoft.com/office/drawing/2010/main" xmlns="">
+              <a14:hiddenFill xmlns="" xmlns:a14="http://schemas.microsoft.com/office/drawing/2010/main">
                 <a:solidFill>
                   <a:srgbClr val="FFFFFF"/>
                 </a:solidFill>
               </a14:hiddenFill>
             </a:ext>
             <a:ext uri="{91240B29-F687-4f45-9708-019B960494DF}">
-              <a14:hiddenLine xmlns:a14="http://schemas.microsoft.com/office/drawing/2010/main" xmlns="" w="9525">
+              <a14:hiddenLine xmlns="" xmlns:a14="http://schemas.microsoft.com/office/drawing/2010/main" w="9525">
                 <a:solidFill>
                   <a:srgbClr val="000000"/>
                 </a:solidFill>
@@ -4521,14 +4521,14 @@
           <a:noFill/>
           <a:extLst>
             <a:ext uri="{909E8E84-426E-40dd-AFC4-6F175D3DCCD1}">
-              <a14:hiddenFill xmlns:a14="http://schemas.microsoft.com/office/drawing/2010/main" xmlns="">
+              <a14:hiddenFill xmlns="" xmlns:a14="http://schemas.microsoft.com/office/drawing/2010/main">
                 <a:solidFill>
                   <a:srgbClr val="FFFFFF"/>
                 </a:solidFill>
               </a14:hiddenFill>
             </a:ext>
             <a:ext uri="{91240B29-F687-4f45-9708-019B960494DF}">
-              <a14:hiddenLine xmlns:a14="http://schemas.microsoft.com/office/drawing/2010/main" xmlns="" w="9525">
+              <a14:hiddenLine xmlns="" xmlns:a14="http://schemas.microsoft.com/office/drawing/2010/main" w="9525">
                 <a:solidFill>
                   <a:srgbClr val="000000"/>
                 </a:solidFill>
@@ -4700,7 +4700,7 @@
         <p:spPr>
           <a:extLst>
             <a:ext uri="{FAA26D3D-D897-4be2-8F04-BA451C77F1D7}">
-              <ma14:placeholderFlag xmlns:ma14="http://schemas.microsoft.com/office/mac/drawingml/2011/main" xmlns="" val="1"/>
+              <ma14:placeholderFlag xmlns="" xmlns:ma14="http://schemas.microsoft.com/office/mac/drawingml/2011/main" val="1"/>
             </a:ext>
           </a:extLst>
         </p:spPr>
@@ -4762,14 +4762,14 @@
           <a:noFill/>
           <a:extLst>
             <a:ext uri="{909E8E84-426E-40dd-AFC4-6F175D3DCCD1}">
-              <a14:hiddenFill xmlns:a14="http://schemas.microsoft.com/office/drawing/2010/main" xmlns="">
+              <a14:hiddenFill xmlns="" xmlns:a14="http://schemas.microsoft.com/office/drawing/2010/main">
                 <a:solidFill>
                   <a:srgbClr val="FFFFFF"/>
                 </a:solidFill>
               </a14:hiddenFill>
             </a:ext>
             <a:ext uri="{91240B29-F687-4f45-9708-019B960494DF}">
-              <a14:hiddenLine xmlns:a14="http://schemas.microsoft.com/office/drawing/2010/main" xmlns="" w="9525">
+              <a14:hiddenLine xmlns="" xmlns:a14="http://schemas.microsoft.com/office/drawing/2010/main" w="9525">
                 <a:solidFill>
                   <a:srgbClr val="000000"/>
                 </a:solidFill>
@@ -4917,14 +4917,14 @@
           <a:noFill/>
           <a:extLst>
             <a:ext uri="{909E8E84-426E-40dd-AFC4-6F175D3DCCD1}">
-              <a14:hiddenFill xmlns:a14="http://schemas.microsoft.com/office/drawing/2010/main" xmlns="">
+              <a14:hiddenFill xmlns="" xmlns:a14="http://schemas.microsoft.com/office/drawing/2010/main">
                 <a:solidFill>
                   <a:srgbClr val="FFFFFF"/>
                 </a:solidFill>
               </a14:hiddenFill>
             </a:ext>
             <a:ext uri="{91240B29-F687-4f45-9708-019B960494DF}">
-              <a14:hiddenLine xmlns:a14="http://schemas.microsoft.com/office/drawing/2010/main" xmlns="" w="9525">
+              <a14:hiddenLine xmlns="" xmlns:a14="http://schemas.microsoft.com/office/drawing/2010/main" w="9525">
                 <a:solidFill>
                   <a:srgbClr val="000000"/>
                 </a:solidFill>
@@ -5072,14 +5072,14 @@
           <a:noFill/>
           <a:extLst>
             <a:ext uri="{909E8E84-426E-40dd-AFC4-6F175D3DCCD1}">
-              <a14:hiddenFill xmlns:a14="http://schemas.microsoft.com/office/drawing/2010/main" xmlns="">
+              <a14:hiddenFill xmlns="" xmlns:a14="http://schemas.microsoft.com/office/drawing/2010/main">
                 <a:solidFill>
                   <a:srgbClr val="FFFFFF"/>
                 </a:solidFill>
               </a14:hiddenFill>
             </a:ext>
             <a:ext uri="{91240B29-F687-4f45-9708-019B960494DF}">
-              <a14:hiddenLine xmlns:a14="http://schemas.microsoft.com/office/drawing/2010/main" xmlns="" w="9525">
+              <a14:hiddenLine xmlns="" xmlns:a14="http://schemas.microsoft.com/office/drawing/2010/main" w="9525">
                 <a:solidFill>
                   <a:srgbClr val="000000"/>
                 </a:solidFill>
@@ -5251,7 +5251,7 @@
         <p:spPr>
           <a:extLst>
             <a:ext uri="{FAA26D3D-D897-4be2-8F04-BA451C77F1D7}">
-              <ma14:placeholderFlag xmlns:ma14="http://schemas.microsoft.com/office/mac/drawingml/2011/main" xmlns="" val="1"/>
+              <ma14:placeholderFlag xmlns="" xmlns:ma14="http://schemas.microsoft.com/office/mac/drawingml/2011/main" val="1"/>
             </a:ext>
           </a:extLst>
         </p:spPr>
@@ -8988,7 +8988,7 @@
                 <a:ea typeface="+mj-ea"/>
                 <a:cs typeface="+mj-cs"/>
               </a:rPr>
-              <a:t>Understanding class definitions 3</a:t>
+              <a:t>Understanding class definitions 4</a:t>
             </a:r>
           </a:p>
         </p:txBody>
@@ -9005,8 +9005,8 @@
         </p:nvSpPr>
         <p:spPr>
           <a:xfrm>
-            <a:off x="98936" y="1418712"/>
-            <a:ext cx="10134430" cy="846384"/>
+            <a:off x="98936" y="1549516"/>
+            <a:ext cx="10134430" cy="584775"/>
           </a:xfrm>
         </p:spPr>
         <p:txBody>
@@ -9017,12 +9017,16 @@
               <a:defRPr/>
             </a:pPr>
             <a:r>
-              <a:rPr lang="en-GB" dirty="0">
+              <a:rPr lang="en-GB">
                 <a:ea typeface="+mn-ea"/>
                 <a:cs typeface="+mn-cs"/>
               </a:rPr>
-              <a:t>Exploring source code</a:t>
-            </a:r>
+              <a:t>Local Variables</a:t>
+            </a:r>
+            <a:endParaRPr lang="en-GB" dirty="0">
+              <a:ea typeface="+mn-ea"/>
+              <a:cs typeface="+mn-cs"/>
+            </a:endParaRPr>
           </a:p>
         </p:txBody>
       </p:sp>
@@ -9048,14 +9052,14 @@
           </a:ln>
           <a:extLst>
             <a:ext uri="{909E8E84-426E-40dd-AFC4-6F175D3DCCD1}">
-              <a14:hiddenFill xmlns:a14="http://schemas.microsoft.com/office/drawing/2010/main" xmlns="">
+              <a14:hiddenFill xmlns="" xmlns:a14="http://schemas.microsoft.com/office/drawing/2010/main">
                 <a:solidFill>
                   <a:srgbClr val="FFFFFF"/>
                 </a:solidFill>
               </a14:hiddenFill>
             </a:ext>
             <a:ext uri="{91240B29-F687-4f45-9708-019B960494DF}">
-              <a14:hiddenLine xmlns:a14="http://schemas.microsoft.com/office/drawing/2010/main" xmlns="" w="9525">
+              <a14:hiddenLine xmlns="" xmlns:a14="http://schemas.microsoft.com/office/drawing/2010/main" w="9525">
                 <a:solidFill>
                   <a:srgbClr val="000000"/>
                 </a:solidFill>
@@ -13233,14 +13237,14 @@
           </a:ln>
           <a:extLst>
             <a:ext uri="{909E8E84-426E-40dd-AFC4-6F175D3DCCD1}">
-              <a14:hiddenFill xmlns:a14="http://schemas.microsoft.com/office/drawing/2010/main" xmlns="">
+              <a14:hiddenFill xmlns="" xmlns:a14="http://schemas.microsoft.com/office/drawing/2010/main">
                 <a:solidFill>
                   <a:srgbClr val="FFFFFF"/>
                 </a:solidFill>
               </a14:hiddenFill>
             </a:ext>
             <a:ext uri="{91240B29-F687-4f45-9708-019B960494DF}">
-              <a14:hiddenLine xmlns:a14="http://schemas.microsoft.com/office/drawing/2010/main" xmlns="" w="9525">
+              <a14:hiddenLine xmlns="" xmlns:a14="http://schemas.microsoft.com/office/drawing/2010/main" w="9525">
                 <a:solidFill>
                   <a:srgbClr val="000000"/>
                 </a:solidFill>
@@ -14040,14 +14044,14 @@
           </a:ln>
           <a:extLst>
             <a:ext uri="{909E8E84-426E-40dd-AFC4-6F175D3DCCD1}">
-              <a14:hiddenFill xmlns:a14="http://schemas.microsoft.com/office/drawing/2010/main" xmlns="">
+              <a14:hiddenFill xmlns="" xmlns:a14="http://schemas.microsoft.com/office/drawing/2010/main">
                 <a:solidFill>
                   <a:srgbClr val="FFFFFF"/>
                 </a:solidFill>
               </a14:hiddenFill>
             </a:ext>
             <a:ext uri="{91240B29-F687-4f45-9708-019B960494DF}">
-              <a14:hiddenLine xmlns:a14="http://schemas.microsoft.com/office/drawing/2010/main" xmlns="" w="9525">
+              <a14:hiddenLine xmlns="" xmlns:a14="http://schemas.microsoft.com/office/drawing/2010/main" w="9525">
                 <a:solidFill>
                   <a:srgbClr val="000000"/>
                 </a:solidFill>
@@ -14872,14 +14876,14 @@
           </a:ln>
           <a:extLst>
             <a:ext uri="{909E8E84-426E-40dd-AFC4-6F175D3DCCD1}">
-              <a14:hiddenFill xmlns:a14="http://schemas.microsoft.com/office/drawing/2010/main" xmlns="">
+              <a14:hiddenFill xmlns="" xmlns:a14="http://schemas.microsoft.com/office/drawing/2010/main">
                 <a:solidFill>
                   <a:srgbClr val="FFFFFF"/>
                 </a:solidFill>
               </a14:hiddenFill>
             </a:ext>
             <a:ext uri="{91240B29-F687-4f45-9708-019B960494DF}">
-              <a14:hiddenLine xmlns:a14="http://schemas.microsoft.com/office/drawing/2010/main" xmlns="" w="9525">
+              <a14:hiddenLine xmlns="" xmlns:a14="http://schemas.microsoft.com/office/drawing/2010/main" w="9525">
                 <a:solidFill>
                   <a:srgbClr val="000000"/>
                 </a:solidFill>
@@ -15300,14 +15304,14 @@
           </a:ln>
           <a:extLst>
             <a:ext uri="{909E8E84-426E-40dd-AFC4-6F175D3DCCD1}">
-              <a14:hiddenFill xmlns:a14="http://schemas.microsoft.com/office/drawing/2010/main" xmlns="">
+              <a14:hiddenFill xmlns="" xmlns:a14="http://schemas.microsoft.com/office/drawing/2010/main">
                 <a:solidFill>
                   <a:srgbClr val="FFFFFF"/>
                 </a:solidFill>
               </a14:hiddenFill>
             </a:ext>
             <a:ext uri="{91240B29-F687-4f45-9708-019B960494DF}">
-              <a14:hiddenLine xmlns:a14="http://schemas.microsoft.com/office/drawing/2010/main" xmlns="" w="9525">
+              <a14:hiddenLine xmlns="" xmlns:a14="http://schemas.microsoft.com/office/drawing/2010/main" w="9525">
                 <a:solidFill>
                   <a:srgbClr val="000000"/>
                 </a:solidFill>
@@ -15665,14 +15669,14 @@
           </a:ln>
           <a:extLst>
             <a:ext uri="{909E8E84-426E-40dd-AFC4-6F175D3DCCD1}">
-              <a14:hiddenFill xmlns:a14="http://schemas.microsoft.com/office/drawing/2010/main" xmlns="">
+              <a14:hiddenFill xmlns="" xmlns:a14="http://schemas.microsoft.com/office/drawing/2010/main">
                 <a:solidFill>
                   <a:srgbClr val="FFFFFF"/>
                 </a:solidFill>
               </a14:hiddenFill>
             </a:ext>
             <a:ext uri="{91240B29-F687-4f45-9708-019B960494DF}">
-              <a14:hiddenLine xmlns:a14="http://schemas.microsoft.com/office/drawing/2010/main" xmlns="" w="9525">
+              <a14:hiddenLine xmlns="" xmlns:a14="http://schemas.microsoft.com/office/drawing/2010/main" w="9525">
                 <a:solidFill>
                   <a:srgbClr val="000000"/>
                 </a:solidFill>
@@ -15913,7 +15917,7 @@
           </a:ln>
           <a:extLst>
             <a:ext uri="{909E8E84-426E-40dd-AFC4-6F175D3DCCD1}">
-              <a14:hiddenFill xmlns:a14="http://schemas.microsoft.com/office/drawing/2010/main" xmlns="">
+              <a14:hiddenFill xmlns="" xmlns:a14="http://schemas.microsoft.com/office/drawing/2010/main">
                 <a:noFill/>
               </a14:hiddenFill>
             </a:ext>
